--- a/项目内容/第二次组会报告/第二次组会.pptx
+++ b/项目内容/第二次组会报告/第二次组会.pptx
@@ -129,7 +129,7 @@
             <a:srgbClr val="A4A3A4"/>
           </p15:clr>
         </p15:guide>
-        <p15:guide id="2" orient="horz" pos="2114" userDrawn="1">
+        <p15:guide id="2" orient="horz" pos="2060" userDrawn="1">
           <p15:clr>
             <a:srgbClr val="A4A3A4"/>
           </p15:clr>
@@ -7857,8 +7857,8 @@
         </p:nvSpPr>
         <p:spPr>
           <a:xfrm>
-            <a:off x="838200" y="1825625"/>
-            <a:ext cx="5600065" cy="4351655"/>
+            <a:off x="838200" y="1462405"/>
+            <a:ext cx="5600065" cy="4973955"/>
           </a:xfrm>
         </p:spPr>
         <p:txBody>
@@ -7876,51 +7876,101 @@
             <a:pPr marL="0" indent="0">
               <a:buNone/>
             </a:pPr>
+            <a:endParaRPr lang="zh-CN" altLang="en-US" sz="1800"/>
+          </a:p>
+          <a:p>
+            <a:pPr marL="0" indent="0">
+              <a:buNone/>
+            </a:pPr>
             <a:r>
               <a:rPr lang="zh-CN" altLang="en-US" sz="1800"/>
-              <a:t>提出了一种改进的自适应遗传算法（</a:t>
+              <a:t>将四通道</a:t>
             </a:r>
             <a:r>
               <a:rPr lang="en-US" altLang="zh-CN" sz="1800"/>
-              <a:t>GA），</a:t>
+              <a:t>EPC</a:t>
             </a:r>
             <a:r>
               <a:rPr lang="zh-CN" altLang="en-US" sz="1800"/>
-              <a:t>并在基于非线性偏振旋转的锁模掺铒光纤激光器（</a:t>
+              <a:t>电压编码为遗传算法的四个基因，并用</a:t>
+            </a:r>
+            <a:endParaRPr lang="zh-CN" altLang="en-US" sz="1800"/>
+          </a:p>
+          <a:p>
+            <a:pPr marL="0" indent="0">
+              <a:buNone/>
+            </a:pPr>
+            <a:r>
+              <a:rPr lang="zh-CN" altLang="en-US" sz="1800"/>
+              <a:t>示波器脉冲平均幅度构造适应度</a:t>
+            </a:r>
+            <a:endParaRPr lang="zh-CN" altLang="en-US" sz="1800"/>
+          </a:p>
+          <a:p>
+            <a:pPr marL="0" indent="0">
+              <a:buNone/>
+            </a:pPr>
+            <a:endParaRPr lang="zh-CN" altLang="en-US" sz="1800"/>
+          </a:p>
+          <a:p>
+            <a:pPr marL="0" indent="0">
+              <a:buNone/>
+            </a:pPr>
+            <a:endParaRPr lang="zh-CN" altLang="en-US" sz="1800"/>
+          </a:p>
+          <a:p>
+            <a:pPr marL="0" indent="0">
+              <a:buNone/>
+            </a:pPr>
+            <a:endParaRPr lang="zh-CN" altLang="en-US" sz="1800"/>
+          </a:p>
+          <a:p>
+            <a:pPr marL="0" indent="0">
+              <a:buNone/>
+            </a:pPr>
+            <a:r>
+              <a:rPr lang="zh-CN" altLang="en-US" sz="1800"/>
+              <a:t>80次实验平均约2代进入展宽脉冲锁模，94%的实验在4代以内完成。</a:t>
+            </a:r>
+            <a:endParaRPr lang="zh-CN" altLang="en-US" sz="1800"/>
+          </a:p>
+          <a:p>
+            <a:pPr marL="0" indent="0">
+              <a:buNone/>
+            </a:pPr>
+            <a:endParaRPr lang="zh-CN" altLang="en-US" sz="1800"/>
+          </a:p>
+          <a:p>
+            <a:pPr marL="0" indent="0">
+              <a:buNone/>
+            </a:pPr>
+            <a:r>
+              <a:rPr lang="zh-CN" altLang="en-US" sz="1800"/>
+              <a:t>局限：</a:t>
+            </a:r>
+            <a:endParaRPr lang="zh-CN" altLang="en-US" sz="1800"/>
+          </a:p>
+          <a:p>
+            <a:pPr marL="0" indent="0">
+              <a:buNone/>
+            </a:pPr>
+            <a:r>
+              <a:rPr lang="zh-CN" altLang="en-US" sz="1800"/>
+              <a:t>高度依赖阈值参数设计，且</a:t>
             </a:r>
             <a:r>
               <a:rPr lang="en-US" altLang="zh-CN" sz="1800"/>
-              <a:t>EDFL）</a:t>
-            </a:r>
-            <a:r>
-              <a:rPr lang="zh-CN" altLang="en-US" sz="1800"/>
-              <a:t>中实现。该算法将 </a:t>
-            </a:r>
-            <a:r>
-              <a:rPr lang="en-US" altLang="zh-CN" sz="1800"/>
-              <a:t>GA </a:t>
-            </a:r>
-            <a:r>
-              <a:rPr lang="zh-CN" altLang="en-US" sz="1800"/>
-              <a:t>与自适应交叉概率和变异率相结合。随着求解过程中迭代次数的增加，交叉概率和变异率随着适应度函数值的变化而动态调整。当改进的自适应遗传算法不断优化以将腔内偏振态收敛到目标态时，会自动生成展宽脉冲。从其他状态调整到展宽脉冲锁定所需的平均代数为 2，这比一般 </a:t>
-            </a:r>
-            <a:r>
-              <a:rPr lang="en-US" altLang="zh-CN" sz="1800"/>
-              <a:t>GA </a:t>
-            </a:r>
-            <a:r>
-              <a:rPr lang="zh-CN" altLang="en-US" sz="1800"/>
-              <a:t>提供的要好。研究了具有不同交叉概率和变异率的锁模 </a:t>
-            </a:r>
-            <a:r>
-              <a:rPr lang="en-US" altLang="zh-CN" sz="1800"/>
-              <a:t>EDFL </a:t>
-            </a:r>
-            <a:r>
-              <a:rPr lang="zh-CN" altLang="en-US" sz="1800"/>
-              <a:t>的演化曲线，结果表明了所提出的改进自适应遗传算法的有效性。</a:t>
-            </a:r>
-            <a:endParaRPr lang="zh-CN" altLang="en-US" sz="1800"/>
+              <a:t>GA</a:t>
+            </a:r>
+            <a:r>
+              <a:rPr lang="zh-CN" altLang="en-US" sz="1800">
+                <a:ea typeface="宋体" charset="0"/>
+              </a:rPr>
+              <a:t>本质依然是在黑箱搜索</a:t>
+            </a:r>
+            <a:endParaRPr lang="zh-CN" altLang="en-US" sz="1800">
+              <a:ea typeface="宋体" charset="0"/>
+            </a:endParaRPr>
           </a:p>
         </p:txBody>
       </p:sp>
@@ -7940,8 +7990,56 @@
         </p:blipFill>
         <p:spPr>
           <a:xfrm>
-            <a:off x="6438265" y="1485900"/>
-            <a:ext cx="5745480" cy="3799840"/>
+            <a:off x="6527165" y="75565"/>
+            <a:ext cx="5567680" cy="3682365"/>
+          </a:xfrm>
+          <a:prstGeom prst="rect">
+            <a:avLst/>
+          </a:prstGeom>
+        </p:spPr>
+      </p:pic>
+      <p:pic>
+        <p:nvPicPr>
+          <p:cNvPr id="4" name="图片 3"/>
+          <p:cNvPicPr>
+            <a:picLocks noChangeAspect="1"/>
+          </p:cNvPicPr>
+          <p:nvPr/>
+        </p:nvPicPr>
+        <p:blipFill>
+          <a:blip r:embed="rId2"/>
+          <a:stretch>
+            <a:fillRect/>
+          </a:stretch>
+        </p:blipFill>
+        <p:spPr>
+          <a:xfrm>
+            <a:off x="6273165" y="3939540"/>
+            <a:ext cx="3514090" cy="2902585"/>
+          </a:xfrm>
+          <a:prstGeom prst="rect">
+            <a:avLst/>
+          </a:prstGeom>
+        </p:spPr>
+      </p:pic>
+      <p:pic>
+        <p:nvPicPr>
+          <p:cNvPr id="6" name="图片 5"/>
+          <p:cNvPicPr>
+            <a:picLocks noChangeAspect="1"/>
+          </p:cNvPicPr>
+          <p:nvPr/>
+        </p:nvPicPr>
+        <p:blipFill>
+          <a:blip r:embed="rId3"/>
+          <a:stretch>
+            <a:fillRect/>
+          </a:stretch>
+        </p:blipFill>
+        <p:spPr>
+          <a:xfrm>
+            <a:off x="2487295" y="3147060"/>
+            <a:ext cx="2303145" cy="1007110"/>
           </a:xfrm>
           <a:prstGeom prst="rect">
             <a:avLst/>
@@ -8019,25 +8117,133 @@
             </a:pPr>
             <a:r>
               <a:rPr lang="zh-CN" altLang="en-US" sz="1800"/>
-              <a:t>我们提出了一种新方法，用于确定光纤中的非线性偏振旋转效应能够产生锁模脉冲的区域。该方法以谐振腔内实际光纤的 </a:t>
+              <a:t>传统</a:t>
             </a:r>
             <a:r>
               <a:rPr lang="en-US" altLang="zh-CN" sz="1800"/>
-              <a:t>Jones </a:t>
+              <a:t>NPR</a:t>
             </a:r>
             <a:r>
               <a:rPr lang="zh-CN" altLang="en-US" sz="1800"/>
-              <a:t>矩阵为基础；该矩阵表征了光纤弯曲、扭转所导致的双折射以及非线性效应。利用测得的 </a:t>
+              <a:t>稳定性分析通常使用理想光纤的</a:t>
             </a:r>
             <a:r>
               <a:rPr lang="en-US" altLang="zh-CN" sz="1800"/>
-              <a:t>Jones </a:t>
+              <a:t>Kerr</a:t>
             </a:r>
             <a:r>
               <a:rPr lang="zh-CN" altLang="en-US" sz="1800"/>
-              <a:t>矩阵，可以改进稳定锁模区域的理论分析。结果表明，所提出的方法能够预测实验中测得的锁模区域。</a:t>
-            </a:r>
-            <a:endParaRPr lang="zh-CN" altLang="en-US" sz="1800"/>
+              <a:t>非线性</a:t>
+            </a:r>
+            <a:r>
+              <a:rPr lang="en-US" altLang="zh-CN" sz="1800"/>
+              <a:t>Jones</a:t>
+            </a:r>
+            <a:r>
+              <a:rPr lang="zh-CN" altLang="en-US" sz="1800"/>
+              <a:t>矩阵</a:t>
+            </a:r>
+            <a:r>
+              <a:rPr lang="zh-CN" altLang="en-US" sz="1800">
+                <a:ea typeface="宋体" charset="0"/>
+              </a:rPr>
+              <a:t>，但是实际上真实光纤还有弯曲，扭转，安装应力等因素影响双折射。所以建模不精准。</a:t>
+            </a:r>
+            <a:endParaRPr lang="zh-CN" altLang="en-US" sz="1800">
+              <a:ea typeface="宋体" charset="0"/>
+            </a:endParaRPr>
+          </a:p>
+          <a:p>
+            <a:pPr marL="0" indent="0">
+              <a:buNone/>
+            </a:pPr>
+            <a:endParaRPr lang="zh-CN" altLang="en-US" sz="1800">
+              <a:ea typeface="宋体" charset="0"/>
+            </a:endParaRPr>
+          </a:p>
+          <a:p>
+            <a:pPr marL="0" indent="0">
+              <a:buNone/>
+            </a:pPr>
+            <a:r>
+              <a:rPr lang="zh-CN" altLang="en-US" sz="1800">
+                <a:ea typeface="宋体" charset="0"/>
+              </a:rPr>
+              <a:t>因此作者先用弱功率测得一个真实的</a:t>
+            </a:r>
+            <a:r>
+              <a:rPr lang="en-US" altLang="zh-CN" sz="1800">
+                <a:ea typeface="宋体" charset="0"/>
+              </a:rPr>
+              <a:t>Jones</a:t>
+            </a:r>
+            <a:r>
+              <a:rPr lang="zh-CN" altLang="en-US" sz="1800">
+                <a:ea typeface="宋体" charset="0"/>
+              </a:rPr>
+              <a:t>矩阵，在通过参数预测的方式得到</a:t>
+            </a:r>
+            <a:r>
+              <a:rPr lang="en-US" altLang="zh-CN" sz="1800">
+                <a:ea typeface="宋体" charset="0"/>
+              </a:rPr>
+              <a:t>Kerr</a:t>
+            </a:r>
+            <a:r>
+              <a:rPr lang="zh-CN" altLang="en-US" sz="1800">
+                <a:ea typeface="宋体" charset="0"/>
+              </a:rPr>
+              <a:t>效应矩阵。从而让</a:t>
+            </a:r>
+            <a:r>
+              <a:rPr lang="en-US" altLang="zh-CN" sz="1800">
+                <a:ea typeface="宋体" charset="0"/>
+              </a:rPr>
+              <a:t>SMF</a:t>
+            </a:r>
+            <a:r>
+              <a:rPr lang="zh-CN" altLang="en-US" sz="1800">
+                <a:ea typeface="宋体" charset="0"/>
+              </a:rPr>
+              <a:t>的仿真更加准确。</a:t>
+            </a:r>
+            <a:endParaRPr lang="zh-CN" altLang="en-US" sz="1800">
+              <a:ea typeface="宋体" charset="0"/>
+            </a:endParaRPr>
+          </a:p>
+          <a:p>
+            <a:pPr marL="0" indent="0">
+              <a:buNone/>
+            </a:pPr>
+            <a:endParaRPr lang="zh-CN" altLang="en-US" sz="1800">
+              <a:ea typeface="宋体" charset="0"/>
+            </a:endParaRPr>
+          </a:p>
+          <a:p>
+            <a:pPr marL="0" indent="0">
+              <a:buNone/>
+            </a:pPr>
+            <a:r>
+              <a:rPr lang="zh-CN" altLang="en-US" sz="1800">
+                <a:ea typeface="宋体" charset="0"/>
+              </a:rPr>
+              <a:t>局限：作者不知道线性双折射矩阵和</a:t>
+            </a:r>
+            <a:r>
+              <a:rPr lang="en-US" altLang="zh-CN" sz="1800">
+                <a:ea typeface="宋体" charset="0"/>
+              </a:rPr>
+              <a:t>Kerr</a:t>
+            </a:r>
+            <a:r>
+              <a:rPr lang="zh-CN" altLang="en-US" sz="1800">
+                <a:ea typeface="宋体" charset="0"/>
+              </a:rPr>
+              <a:t>矩阵的乘法顺序，只通过实验选择了一种更加合适的方式。</a:t>
+            </a:r>
+            <a:endParaRPr lang="zh-CN" altLang="en-US" sz="1800">
+              <a:ea typeface="宋体" charset="0"/>
+            </a:endParaRPr>
           </a:p>
         </p:txBody>
       </p:sp>
@@ -8136,7 +8342,31 @@
             </a:pPr>
             <a:r>
               <a:rPr lang="zh-CN" altLang="en-US" sz="1800"/>
-              <a:t>本文着重讨论采用非分布式模型对超短脉冲锁模光纤激光器进行数值模拟时涉及的若干问题。研究表明，即使系统参数固定，不同初始条件仍可能通向多个吸引子，这种现象在不同锁模机制之间的过渡区域尤其明显。本文还展示了通过逐步提高增益，可将从不同量子噪声场出发并分别趋于多个吸引子的情形，收敛到单一解。基于这些分析和模型，本文重新考察了由腔内色散和增益光纤饱和能量变化所产生的不同锁模状态，并指出：由自相似演化产生线性啁啾抛物线脉冲的工作区，包含在更广义的无波破裂锁模区域之中。</a:t>
+              <a:t>将增益光纤、可饱和吸收体、输出耦合器、色散补偿器和 </a:t>
+            </a:r>
+            <a:r>
+              <a:rPr lang="en-US" altLang="zh-CN" sz="1800"/>
+              <a:t>SMF </a:t>
+            </a:r>
+            <a:r>
+              <a:rPr lang="zh-CN" altLang="en-US" sz="1800"/>
+              <a:t>分别数字建模，使用分步傅里叶法逐圈模拟脉冲演化。</a:t>
+            </a:r>
+            <a:endParaRPr lang="zh-CN" altLang="en-US" sz="1800"/>
+          </a:p>
+          <a:p>
+            <a:pPr marL="0" indent="0">
+              <a:buNone/>
+            </a:pPr>
+            <a:endParaRPr lang="zh-CN" altLang="en-US" sz="1800"/>
+          </a:p>
+          <a:p>
+            <a:pPr marL="0" indent="0">
+              <a:buNone/>
+            </a:pPr>
+            <a:r>
+              <a:rPr lang="zh-CN" altLang="en-US" sz="1800"/>
+              <a:t>即使相同的腔参数可能因初始光场不同而收敛到不同的锁模状态。</a:t>
             </a:r>
             <a:endParaRPr lang="zh-CN" altLang="en-US" sz="1800"/>
           </a:p>
@@ -9386,7 +9616,7 @@
               <a:rPr lang="zh-CN" altLang="en-US">
                 <a:ea typeface="宋体" charset="0"/>
               </a:rPr>
-              <a:t>探索是否能根据光谱特征和示波器数据构建有效信息，让反馈算法可以有信息的进行参数搜索。（创新点）</a:t>
+              <a:t>探索是否能根据光谱特征和示波器数据构建有效信息，让反馈算法可以有信息的进行参数搜索。（可能的创新点）</a:t>
             </a:r>
             <a:endParaRPr lang="zh-CN" altLang="en-US">
               <a:ea typeface="宋体" charset="0"/>
@@ -10703,8 +10933,8 @@
         </p:nvSpPr>
         <p:spPr>
           <a:xfrm>
-            <a:off x="838200" y="1825625"/>
-            <a:ext cx="5600065" cy="4351655"/>
+            <a:off x="838200" y="1506220"/>
+            <a:ext cx="5600065" cy="5351780"/>
           </a:xfrm>
         </p:spPr>
         <p:txBody>
@@ -10723,76 +10953,154 @@
               <a:buNone/>
             </a:pPr>
             <a:r>
-              <a:rPr lang="zh-CN" altLang="en-US" sz="1800"/>
-              <a:t>自动锁模是光纤激光器产生超短脉冲的重要方法。本文开发了一种随机搜索算法，并搭建了自动锁模激光器。作者首先对自动锁模掺镱光纤激光器进行数值仿真，成功获得连续波与锁模脉冲状态；随后利用挤压式电动偏振控制器调节锁模状态，实现了 532.71 </a:t>
-            </a:r>
-            <a:r>
-              <a:rPr lang="en-US" altLang="zh-CN" sz="1800"/>
-              <a:t>fs </a:t>
-            </a:r>
-            <a:r>
-              <a:rPr lang="zh-CN" altLang="en-US" sz="1800"/>
-              <a:t>耗散孤子和 23.87 </a:t>
-            </a:r>
-            <a:r>
-              <a:rPr lang="en-US" altLang="zh-CN" sz="1800"/>
-              <a:t>ps </a:t>
-            </a:r>
-            <a:r>
-              <a:rPr lang="zh-CN" altLang="en-US" sz="1800"/>
-              <a:t>噪声型脉冲的可控输出，搜索时间分别为 14.19 </a:t>
-            </a:r>
-            <a:r>
-              <a:rPr lang="en-US" altLang="zh-CN" sz="1800"/>
-              <a:t>s </a:t>
-            </a:r>
-            <a:r>
-              <a:rPr lang="zh-CN" altLang="en-US" sz="1800"/>
-              <a:t>和 2.37 </a:t>
-            </a:r>
-            <a:r>
-              <a:rPr lang="en-US" altLang="zh-CN" sz="1800"/>
-              <a:t>s。</a:t>
-            </a:r>
-            <a:r>
-              <a:rPr lang="zh-CN" altLang="en-US" sz="1800"/>
-              <a:t>二者的中心波长分别为 1034 </a:t>
-            </a:r>
-            <a:r>
-              <a:rPr lang="en-US" altLang="zh-CN" sz="1800"/>
-              <a:t>nm </a:t>
-            </a:r>
-            <a:r>
-              <a:rPr lang="zh-CN" altLang="en-US" sz="1800"/>
-              <a:t>和 1038 </a:t>
-            </a:r>
-            <a:r>
-              <a:rPr lang="en-US" altLang="zh-CN" sz="1800"/>
-              <a:t>nm，</a:t>
-            </a:r>
-            <a:r>
-              <a:rPr lang="zh-CN" altLang="en-US" sz="1800"/>
-              <a:t>信噪比分别为 63.1 </a:t>
-            </a:r>
-            <a:r>
-              <a:rPr lang="en-US" altLang="zh-CN" sz="1800"/>
-              <a:t>dB </a:t>
-            </a:r>
-            <a:r>
-              <a:rPr lang="zh-CN" altLang="en-US" sz="1800"/>
-              <a:t>和 51.2 </a:t>
-            </a:r>
-            <a:r>
-              <a:rPr lang="en-US" altLang="zh-CN" sz="1800"/>
-              <a:t>dB。</a:t>
-            </a:r>
-            <a:endParaRPr lang="en-US" altLang="zh-CN" sz="1800"/>
+              <a:rPr lang="zh-CN" sz="1800">
+                <a:ea typeface="宋体" charset="0"/>
+              </a:rPr>
+              <a:t>搭建了一套简化的仿真和反馈系统，随机生成</a:t>
+            </a:r>
+            <a:r>
+              <a:rPr lang="en-US" altLang="zh-CN" sz="1800">
+                <a:ea typeface="宋体" charset="0"/>
+              </a:rPr>
+              <a:t>EPC</a:t>
+            </a:r>
+            <a:r>
+              <a:rPr lang="zh-CN" altLang="en-US" sz="1800">
+                <a:ea typeface="宋体" charset="0"/>
+              </a:rPr>
+              <a:t>的控制值，改变腔内的偏振状态，成功搜索耗散孤子和噪声型脉冲。</a:t>
+            </a:r>
+            <a:endParaRPr lang="zh-CN" altLang="en-US" sz="1800">
+              <a:ea typeface="宋体" charset="0"/>
+            </a:endParaRPr>
           </a:p>
           <a:p>
             <a:pPr marL="0" indent="0">
               <a:buNone/>
             </a:pPr>
-            <a:endParaRPr lang="en-US" altLang="zh-CN" sz="1800"/>
+            <a:endParaRPr lang="zh-CN" altLang="en-US" sz="1800">
+              <a:ea typeface="宋体" charset="0"/>
+            </a:endParaRPr>
+          </a:p>
+          <a:p>
+            <a:pPr marL="0" indent="0">
+              <a:buNone/>
+            </a:pPr>
+            <a:r>
+              <a:rPr lang="zh-CN" altLang="en-US" sz="1800">
+                <a:ea typeface="宋体" charset="0"/>
+              </a:rPr>
+              <a:t>连续光：示波器中基本只有背景信号</a:t>
+            </a:r>
+            <a:endParaRPr lang="zh-CN" altLang="en-US" sz="1800">
+              <a:ea typeface="宋体" charset="0"/>
+            </a:endParaRPr>
+          </a:p>
+          <a:p>
+            <a:pPr marL="0" indent="0">
+              <a:buNone/>
+            </a:pPr>
+            <a:r>
+              <a:rPr lang="zh-CN" altLang="en-US" sz="1800">
+                <a:ea typeface="宋体" charset="0"/>
+              </a:rPr>
+              <a:t>不规则调制：时域信号混乱，方差较大</a:t>
+            </a:r>
+            <a:endParaRPr lang="zh-CN" altLang="en-US" sz="1800">
+              <a:ea typeface="宋体" charset="0"/>
+            </a:endParaRPr>
+          </a:p>
+          <a:p>
+            <a:pPr marL="0" indent="0">
+              <a:buNone/>
+            </a:pPr>
+            <a:r>
+              <a:rPr lang="zh-CN" altLang="en-US" sz="1800">
+                <a:ea typeface="宋体" charset="0"/>
+              </a:rPr>
+              <a:t>耗散孤子：光谱展宽，边缘较陡</a:t>
+            </a:r>
+            <a:endParaRPr lang="zh-CN" altLang="en-US" sz="1800">
+              <a:ea typeface="宋体" charset="0"/>
+            </a:endParaRPr>
+          </a:p>
+          <a:p>
+            <a:pPr marL="0" indent="0">
+              <a:buNone/>
+            </a:pPr>
+            <a:r>
+              <a:rPr lang="zh-CN" altLang="en-US" sz="1800">
+                <a:ea typeface="宋体" charset="0"/>
+              </a:rPr>
+              <a:t>噪声型脉冲：光谱更宽，边缘较平滑</a:t>
+            </a:r>
+            <a:endParaRPr lang="zh-CN" altLang="en-US" sz="1800">
+              <a:ea typeface="宋体" charset="0"/>
+            </a:endParaRPr>
+          </a:p>
+          <a:p>
+            <a:pPr marL="0" indent="0">
+              <a:buNone/>
+            </a:pPr>
+            <a:endParaRPr lang="zh-CN" altLang="en-US" sz="1800">
+              <a:ea typeface="宋体" charset="0"/>
+            </a:endParaRPr>
+          </a:p>
+          <a:p>
+            <a:pPr marL="0" indent="0">
+              <a:buNone/>
+            </a:pPr>
+            <a:r>
+              <a:rPr lang="zh-CN" altLang="en-US" sz="1800">
+                <a:ea typeface="宋体" charset="0"/>
+              </a:rPr>
+              <a:t>局限：</a:t>
+            </a:r>
+            <a:endParaRPr lang="zh-CN" altLang="en-US" sz="1800">
+              <a:ea typeface="宋体" charset="0"/>
+            </a:endParaRPr>
+          </a:p>
+          <a:p>
+            <a:pPr marL="0" indent="0">
+              <a:buNone/>
+            </a:pPr>
+            <a:r>
+              <a:rPr lang="zh-CN" altLang="en-US" sz="1800">
+                <a:ea typeface="宋体" charset="0"/>
+              </a:rPr>
+              <a:t>控制参数维数增加时，随机搜索效率迅速下降</a:t>
+            </a:r>
+            <a:endParaRPr lang="zh-CN" altLang="en-US" sz="1800">
+              <a:ea typeface="宋体" charset="0"/>
+            </a:endParaRPr>
+          </a:p>
+          <a:p>
+            <a:pPr marL="0" indent="0">
+              <a:buNone/>
+            </a:pPr>
+            <a:r>
+              <a:rPr lang="zh-CN" altLang="en-US" sz="1800">
+                <a:ea typeface="宋体" charset="0"/>
+              </a:rPr>
+              <a:t>目标脉冲越复杂，随机搜索越困难</a:t>
+            </a:r>
+            <a:endParaRPr lang="zh-CN" altLang="en-US" sz="1800">
+              <a:ea typeface="宋体" charset="0"/>
+            </a:endParaRPr>
+          </a:p>
+          <a:p>
+            <a:pPr marL="0" indent="0">
+              <a:buNone/>
+            </a:pPr>
+            <a:r>
+              <a:rPr lang="zh-CN" altLang="en-US" sz="1800">
+                <a:ea typeface="宋体" charset="0"/>
+              </a:rPr>
+              <a:t>搜索没有利用参数变化如何影响输出的信息</a:t>
+            </a:r>
+            <a:endParaRPr lang="zh-CN" altLang="en-US" sz="1800">
+              <a:ea typeface="宋体" charset="0"/>
+            </a:endParaRPr>
           </a:p>
         </p:txBody>
       </p:sp>
